--- a/docs/presentation/TrackSeed_apresentacao_PT.pptx
+++ b/docs/presentation/TrackSeed_apresentacao_PT.pptx
@@ -2300,7 +2300,7 @@
           </a:prstGeom>
           <a:extLst>
             <a:ext uri="{C572A759-6A51-4108-AA02-DFA0A04FC94B}">
-              <ma14:wrappingTextBoxFlag xmlns="" xmlns:ma14="http://schemas.microsoft.com/office/mac/drawingml/2011/main" val="0"/>
+              <ma14:wrappingTextBoxFlag xmlns:ma14="http://schemas.microsoft.com/office/mac/drawingml/2011/main" xmlns="" val="0"/>
             </a:ext>
           </a:extLst>
         </p:spPr>
@@ -2422,7 +2422,7 @@
           </a:prstGeom>
           <a:extLst>
             <a:ext uri="{C572A759-6A51-4108-AA02-DFA0A04FC94B}">
-              <ma14:wrappingTextBoxFlag xmlns="" xmlns:ma14="http://schemas.microsoft.com/office/mac/drawingml/2011/main" val="0"/>
+              <ma14:wrappingTextBoxFlag xmlns:ma14="http://schemas.microsoft.com/office/mac/drawingml/2011/main" xmlns="" val="0"/>
             </a:ext>
           </a:extLst>
         </p:spPr>
@@ -2497,7 +2497,7 @@
           </a:prstGeom>
           <a:extLst>
             <a:ext uri="{C572A759-6A51-4108-AA02-DFA0A04FC94B}">
-              <ma14:wrappingTextBoxFlag xmlns="" xmlns:ma14="http://schemas.microsoft.com/office/mac/drawingml/2011/main" val="0"/>
+              <ma14:wrappingTextBoxFlag xmlns:ma14="http://schemas.microsoft.com/office/mac/drawingml/2011/main" xmlns="" val="0"/>
             </a:ext>
           </a:extLst>
         </p:spPr>
@@ -2879,14 +2879,15 @@
                   <a:schemeClr val="bg1"/>
                 </a:solidFill>
               </a:rPr>
-              <a:t>Colocação de cones com RA e digital twin da pista para a Formula Student</a:t>
-            </a:r>
-            <a:endParaRPr lang="pt-PT" sz="2200" dirty="0"/>
-          </a:p>
-          <a:p>
-            <a:pPr marL="0" indent="0">
-              <a:buNone/>
-            </a:pPr>
+              <a:t>Montagem de pistas de Formula Student com RA e digital twin </a:t>
+            </a:r>
+            <a:br>
+              <a:rPr lang="pt-PT" sz="2200" dirty="0">
+                <a:solidFill>
+                  <a:schemeClr val="bg1"/>
+                </a:solidFill>
+              </a:rPr>
+            </a:br>
             <a:r>
               <a:rPr lang="pt-PT" sz="1800" dirty="0">
                 <a:solidFill>
@@ -4494,7 +4495,7 @@
           </a:prstGeom>
           <a:extLst>
             <a:ext uri="{C572A759-6A51-4108-AA02-DFA0A04FC94B}">
-              <ma14:wrappingTextBoxFlag xmlns="" xmlns:ma14="http://schemas.microsoft.com/office/mac/drawingml/2011/main" val="0"/>
+              <ma14:wrappingTextBoxFlag xmlns:ma14="http://schemas.microsoft.com/office/mac/drawingml/2011/main" xmlns="" val="0"/>
             </a:ext>
           </a:extLst>
         </p:spPr>
@@ -5359,7 +5360,7 @@
           </a:prstGeom>
           <a:extLst>
             <a:ext uri="{C572A759-6A51-4108-AA02-DFA0A04FC94B}">
-              <ma14:wrappingTextBoxFlag xmlns="" xmlns:ma14="http://schemas.microsoft.com/office/mac/drawingml/2011/main" val="0"/>
+              <ma14:wrappingTextBoxFlag xmlns:ma14="http://schemas.microsoft.com/office/mac/drawingml/2011/main" xmlns="" val="0"/>
             </a:ext>
           </a:extLst>
         </p:spPr>
@@ -5646,7 +5647,7 @@
           </a:prstGeom>
           <a:extLst>
             <a:ext uri="{C572A759-6A51-4108-AA02-DFA0A04FC94B}">
-              <ma14:wrappingTextBoxFlag xmlns="" xmlns:ma14="http://schemas.microsoft.com/office/mac/drawingml/2011/main" val="0"/>
+              <ma14:wrappingTextBoxFlag xmlns:ma14="http://schemas.microsoft.com/office/mac/drawingml/2011/main" xmlns="" val="0"/>
             </a:ext>
           </a:extLst>
         </p:spPr>
@@ -6887,7 +6888,7 @@
           </a:prstGeom>
           <a:extLst>
             <a:ext uri="{C572A759-6A51-4108-AA02-DFA0A04FC94B}">
-              <ma14:wrappingTextBoxFlag xmlns="" xmlns:ma14="http://schemas.microsoft.com/office/mac/drawingml/2011/main" val="0"/>
+              <ma14:wrappingTextBoxFlag xmlns:ma14="http://schemas.microsoft.com/office/mac/drawingml/2011/main" xmlns="" val="0"/>
             </a:ext>
           </a:extLst>
         </p:spPr>
@@ -7978,7 +7979,7 @@
           </a:prstGeom>
           <a:extLst>
             <a:ext uri="{C572A759-6A51-4108-AA02-DFA0A04FC94B}">
-              <ma14:wrappingTextBoxFlag xmlns="" xmlns:ma14="http://schemas.microsoft.com/office/mac/drawingml/2011/main" val="0"/>
+              <ma14:wrappingTextBoxFlag xmlns:ma14="http://schemas.microsoft.com/office/mac/drawingml/2011/main" xmlns="" val="0"/>
             </a:ext>
           </a:extLst>
         </p:spPr>
@@ -8558,7 +8559,7 @@
           </a:prstGeom>
           <a:extLst>
             <a:ext uri="{C572A759-6A51-4108-AA02-DFA0A04FC94B}">
-              <ma14:wrappingTextBoxFlag xmlns="" xmlns:ma14="http://schemas.microsoft.com/office/mac/drawingml/2011/main" val="0"/>
+              <ma14:wrappingTextBoxFlag xmlns:ma14="http://schemas.microsoft.com/office/mac/drawingml/2011/main" xmlns="" val="0"/>
             </a:ext>
           </a:extLst>
         </p:spPr>
@@ -9699,7 +9700,7 @@
           </a:prstGeom>
           <a:extLst>
             <a:ext uri="{C572A759-6A51-4108-AA02-DFA0A04FC94B}">
-              <ma14:wrappingTextBoxFlag xmlns="" xmlns:ma14="http://schemas.microsoft.com/office/mac/drawingml/2011/main" val="0"/>
+              <ma14:wrappingTextBoxFlag xmlns:ma14="http://schemas.microsoft.com/office/mac/drawingml/2011/main" xmlns="" val="0"/>
             </a:ext>
           </a:extLst>
         </p:spPr>
@@ -10962,7 +10963,7 @@
           </a:prstGeom>
           <a:extLst>
             <a:ext uri="{C572A759-6A51-4108-AA02-DFA0A04FC94B}">
-              <ma14:wrappingTextBoxFlag xmlns="" xmlns:ma14="http://schemas.microsoft.com/office/mac/drawingml/2011/main" val="0"/>
+              <ma14:wrappingTextBoxFlag xmlns:ma14="http://schemas.microsoft.com/office/mac/drawingml/2011/main" xmlns="" val="0"/>
             </a:ext>
           </a:extLst>
         </p:spPr>
@@ -11967,7 +11968,7 @@
           </a:prstGeom>
           <a:extLst>
             <a:ext uri="{C572A759-6A51-4108-AA02-DFA0A04FC94B}">
-              <ma14:wrappingTextBoxFlag xmlns="" xmlns:ma14="http://schemas.microsoft.com/office/mac/drawingml/2011/main" val="0"/>
+              <ma14:wrappingTextBoxFlag xmlns:ma14="http://schemas.microsoft.com/office/mac/drawingml/2011/main" xmlns="" val="0"/>
             </a:ext>
           </a:extLst>
         </p:spPr>
@@ -12450,7 +12451,7 @@
           </a:prstGeom>
           <a:extLst>
             <a:ext uri="{C572A759-6A51-4108-AA02-DFA0A04FC94B}">
-              <ma14:wrappingTextBoxFlag xmlns="" xmlns:ma14="http://schemas.microsoft.com/office/mac/drawingml/2011/main" val="0"/>
+              <ma14:wrappingTextBoxFlag xmlns:ma14="http://schemas.microsoft.com/office/mac/drawingml/2011/main" xmlns="" val="0"/>
             </a:ext>
           </a:extLst>
         </p:spPr>
@@ -13302,7 +13303,7 @@
           </a:prstGeom>
           <a:extLst>
             <a:ext uri="{C572A759-6A51-4108-AA02-DFA0A04FC94B}">
-              <ma14:wrappingTextBoxFlag xmlns="" xmlns:ma14="http://schemas.microsoft.com/office/mac/drawingml/2011/main" val="0"/>
+              <ma14:wrappingTextBoxFlag xmlns:ma14="http://schemas.microsoft.com/office/mac/drawingml/2011/main" xmlns="" val="0"/>
             </a:ext>
           </a:extLst>
         </p:spPr>
@@ -14357,7 +14358,7 @@
           </a:prstGeom>
           <a:extLst>
             <a:ext uri="{C572A759-6A51-4108-AA02-DFA0A04FC94B}">
-              <ma14:wrappingTextBoxFlag xmlns="" xmlns:ma14="http://schemas.microsoft.com/office/mac/drawingml/2011/main" val="0"/>
+              <ma14:wrappingTextBoxFlag xmlns:ma14="http://schemas.microsoft.com/office/mac/drawingml/2011/main" xmlns="" val="0"/>
             </a:ext>
           </a:extLst>
         </p:spPr>
@@ -15759,7 +15760,7 @@
           </a:prstGeom>
           <a:extLst>
             <a:ext uri="{C572A759-6A51-4108-AA02-DFA0A04FC94B}">
-              <ma14:wrappingTextBoxFlag xmlns="" xmlns:ma14="http://schemas.microsoft.com/office/mac/drawingml/2011/main" val="0"/>
+              <ma14:wrappingTextBoxFlag xmlns:ma14="http://schemas.microsoft.com/office/mac/drawingml/2011/main" xmlns="" val="0"/>
             </a:ext>
           </a:extLst>
         </p:spPr>
@@ -16640,7 +16641,7 @@
           </a:prstGeom>
           <a:extLst>
             <a:ext uri="{C572A759-6A51-4108-AA02-DFA0A04FC94B}">
-              <ma14:wrappingTextBoxFlag xmlns="" xmlns:ma14="http://schemas.microsoft.com/office/mac/drawingml/2011/main" val="0"/>
+              <ma14:wrappingTextBoxFlag xmlns:ma14="http://schemas.microsoft.com/office/mac/drawingml/2011/main" xmlns="" val="0"/>
             </a:ext>
           </a:extLst>
         </p:spPr>
